--- a/skills/daida-ai/assets/templates/tech.pptx
+++ b/skills/daida-ai/assets/templates/tech.pptx
@@ -2570,9 +2570,12 @@
 <p:sldMaster xmlns:a="http://schemas.openxmlformats.org/drawingml/2006/main" xmlns:r="http://schemas.openxmlformats.org/officeDocument/2006/relationships" xmlns:p="http://schemas.openxmlformats.org/presentationml/2006/main">
   <p:cSld>
     <p:bg>
-      <p:bgRef idx="1001">
-        <a:schemeClr val="bg1"/>
-      </p:bgRef>
+      <p:bgPr>
+        <a:solidFill>
+          <a:srgbClr val="1A1A2E"/>
+        </a:solidFill>
+        <a:effectLst/>
+      </p:bgPr>
     </p:bg>
     <p:spTree>
       <p:nvGrpSpPr>
@@ -3077,52 +3080,52 @@
 </file>
 
 <file path=ppt/theme/theme1.xml><?xml version="1.0" encoding="utf-8"?>
-<a:theme xmlns:a="http://schemas.openxmlformats.org/drawingml/2006/main" name="Office Theme">
+<a:theme xmlns:a="http://schemas.openxmlformats.org/drawingml/2006/main" name="Tech Dark">
   <a:themeElements>
-    <a:clrScheme name="Office">
+    <a:clrScheme name="Tech">
       <a:dk1>
-        <a:sysClr val="windowText" lastClr="000000"/>
+        <a:srgbClr val="E8E8E8"/>
       </a:dk1>
       <a:lt1>
-        <a:sysClr val="window" lastClr="FFFFFF"/>
+        <a:srgbClr val="1A1A2E"/>
       </a:lt1>
       <a:dk2>
-        <a:srgbClr val="1F497D"/>
+        <a:srgbClr val="B0B0B0"/>
       </a:dk2>
       <a:lt2>
-        <a:srgbClr val="EEECE1"/>
+        <a:srgbClr val="2D2D44"/>
       </a:lt2>
       <a:accent1>
-        <a:srgbClr val="4F81BD"/>
+        <a:srgbClr val="00D4FF"/>
       </a:accent1>
       <a:accent2>
-        <a:srgbClr val="C0504D"/>
+        <a:srgbClr val="7B68EE"/>
       </a:accent2>
       <a:accent3>
-        <a:srgbClr val="9BBB59"/>
+        <a:srgbClr val="00E676"/>
       </a:accent3>
       <a:accent4>
-        <a:srgbClr val="8064A2"/>
+        <a:srgbClr val="FF4081"/>
       </a:accent4>
       <a:accent5>
-        <a:srgbClr val="4BACC6"/>
+        <a:srgbClr val="FFD740"/>
       </a:accent5>
       <a:accent6>
-        <a:srgbClr val="F79646"/>
+        <a:srgbClr val="448AFF"/>
       </a:accent6>
       <a:hlink>
-        <a:srgbClr val="0000FF"/>
+        <a:srgbClr val="00D4FF"/>
       </a:hlink>
       <a:folHlink>
-        <a:srgbClr val="800080"/>
+        <a:srgbClr val="7B68EE"/>
       </a:folHlink>
     </a:clrScheme>
     <a:fontScheme name="Office">
       <a:majorFont>
-        <a:latin typeface="Calibri"/>
+        <a:latin typeface="Consolas"/>
         <a:ea typeface=""/>
         <a:cs typeface=""/>
-        <a:font script="Jpan" typeface="ＭＳ Ｐゴシック"/>
+        <a:font script="Jpan" typeface="MS ゴシック"/>
         <a:font script="Hang" typeface="맑은 고딕"/>
         <a:font script="Hans" typeface="宋体"/>
         <a:font script="Hant" typeface="新細明體"/>
@@ -3154,10 +3157,10 @@
         <a:font script="Geor" typeface="Sylfaen"/>
       </a:majorFont>
       <a:minorFont>
-        <a:latin typeface="Calibri"/>
+        <a:latin typeface="Segoe UI"/>
         <a:ea typeface=""/>
         <a:cs typeface=""/>
-        <a:font script="Jpan" typeface="ＭＳ Ｐゴシック"/>
+        <a:font script="Jpan" typeface="メイリオ"/>
         <a:font script="Hang" typeface="맑은 고딕"/>
         <a:font script="Hans" typeface="宋体"/>
         <a:font script="Hant" typeface="新細明體"/>

--- a/skills/daida-ai/assets/templates/tech.pptx
+++ b/skills/daida-ai/assets/templates/tech.pptx
@@ -135,7 +135,7 @@
         <p:spPr>
           <a:xfrm>
             <a:off x="685800" y="2130425"/>
-            <a:ext cx="7772400" cy="1470025"/>
+            <a:ext cx="10820095" cy="1470025"/>
           </a:xfrm>
         </p:spPr>
         <p:txBody>
@@ -163,7 +163,7 @@
         <p:spPr>
           <a:xfrm>
             <a:off x="1371600" y="3886200"/>
-            <a:ext cx="6400800" cy="1752600"/>
+            <a:ext cx="9448495" cy="1752600"/>
           </a:xfrm>
         </p:spPr>
         <p:txBody>
@@ -546,7 +546,7 @@
         </p:nvSpPr>
         <p:spPr>
           <a:xfrm>
-            <a:off x="6629400" y="274638"/>
+            <a:off x="9677095" y="274638"/>
             <a:ext cx="2057400" cy="5851525"/>
           </a:xfrm>
         </p:spPr>
@@ -575,7 +575,7 @@
         <p:spPr>
           <a:xfrm>
             <a:off x="457200" y="274638"/>
-            <a:ext cx="6019800" cy="5851525"/>
+            <a:ext cx="9067495" cy="5851525"/>
           </a:xfrm>
         </p:spPr>
         <p:txBody>
@@ -897,7 +897,7 @@
         <p:spPr>
           <a:xfrm>
             <a:off x="722313" y="4406900"/>
-            <a:ext cx="7772400" cy="1362075"/>
+            <a:ext cx="10747069" cy="1362075"/>
           </a:xfrm>
         </p:spPr>
         <p:txBody>
@@ -929,7 +929,7 @@
         <p:spPr>
           <a:xfrm>
             <a:off x="722313" y="2906713"/>
-            <a:ext cx="7772400" cy="1500187"/>
+            <a:ext cx="10747069" cy="1500187"/>
           </a:xfrm>
         </p:spPr>
         <p:txBody>
@@ -1166,7 +1166,7 @@
         <p:spPr>
           <a:xfrm>
             <a:off x="457200" y="1600200"/>
-            <a:ext cx="4038600" cy="4525963"/>
+            <a:ext cx="5562447" cy="4525963"/>
           </a:xfrm>
         </p:spPr>
         <p:txBody>
@@ -1250,8 +1250,8 @@
         </p:nvSpPr>
         <p:spPr>
           <a:xfrm>
-            <a:off x="4648200" y="1600200"/>
-            <a:ext cx="4038600" cy="4525963"/>
+            <a:off x="6172047" y="1600200"/>
+            <a:ext cx="5562447" cy="4525963"/>
           </a:xfrm>
         </p:spPr>
         <p:txBody>
@@ -1458,7 +1458,7 @@
         <p:spPr>
           <a:xfrm>
             <a:off x="457200" y="1535113"/>
-            <a:ext cx="4040188" cy="639762"/>
+            <a:ext cx="5562447" cy="639762"/>
           </a:xfrm>
         </p:spPr>
         <p:txBody>
@@ -1523,7 +1523,7 @@
         <p:spPr>
           <a:xfrm>
             <a:off x="457200" y="2174875"/>
-            <a:ext cx="4040188" cy="3951288"/>
+            <a:ext cx="5562447" cy="3951288"/>
           </a:xfrm>
         </p:spPr>
         <p:txBody>
@@ -1607,8 +1607,8 @@
         </p:nvSpPr>
         <p:spPr>
           <a:xfrm>
-            <a:off x="4645025" y="1535113"/>
-            <a:ext cx="4041775" cy="639762"/>
+            <a:off x="6172047" y="1535113"/>
+            <a:ext cx="5562447" cy="639762"/>
           </a:xfrm>
         </p:spPr>
         <p:txBody>
@@ -1672,8 +1672,8 @@
         </p:nvSpPr>
         <p:spPr>
           <a:xfrm>
-            <a:off x="4645025" y="2174875"/>
-            <a:ext cx="4041775" cy="3951288"/>
+            <a:off x="6172047" y="2174875"/>
+            <a:ext cx="5562447" cy="3951288"/>
           </a:xfrm>
         </p:spPr>
         <p:txBody>
@@ -2066,7 +2066,7 @@
         <p:spPr>
           <a:xfrm>
             <a:off x="457200" y="273050"/>
-            <a:ext cx="3008313" cy="1162050"/>
+            <a:ext cx="3425898" cy="1162050"/>
           </a:xfrm>
         </p:spPr>
         <p:txBody>
@@ -2097,8 +2097,8 @@
         </p:nvSpPr>
         <p:spPr>
           <a:xfrm>
-            <a:off x="3575050" y="273050"/>
-            <a:ext cx="5111750" cy="5853113"/>
+            <a:off x="3883098" y="273050"/>
+            <a:ext cx="7851397" cy="5853113"/>
           </a:xfrm>
         </p:spPr>
         <p:txBody>
@@ -2183,7 +2183,7 @@
         <p:spPr>
           <a:xfrm>
             <a:off x="457200" y="1435100"/>
-            <a:ext cx="3008313" cy="4691063"/>
+            <a:ext cx="3425898" cy="4691063"/>
           </a:xfrm>
         </p:spPr>
         <p:txBody>
@@ -2342,8 +2342,8 @@
         </p:nvSpPr>
         <p:spPr>
           <a:xfrm>
-            <a:off x="1792288" y="4800600"/>
-            <a:ext cx="5486400" cy="566738"/>
+            <a:off x="1828800" y="4800600"/>
+            <a:ext cx="8534095" cy="566738"/>
           </a:xfrm>
         </p:spPr>
         <p:txBody>
@@ -2374,8 +2374,8 @@
         </p:nvSpPr>
         <p:spPr>
           <a:xfrm>
-            <a:off x="1792288" y="612775"/>
-            <a:ext cx="5486400" cy="4114800"/>
+            <a:off x="1828800" y="612775"/>
+            <a:ext cx="8534095" cy="4114800"/>
           </a:xfrm>
         </p:spPr>
         <p:txBody>
@@ -2435,8 +2435,8 @@
         </p:nvSpPr>
         <p:spPr>
           <a:xfrm>
-            <a:off x="1792288" y="5367338"/>
-            <a:ext cx="5486400" cy="804862"/>
+            <a:off x="1828800" y="5367338"/>
+            <a:ext cx="8534095" cy="804862"/>
           </a:xfrm>
         </p:spPr>
         <p:txBody>
@@ -2570,12 +2570,9 @@
 <p:sldMaster xmlns:a="http://schemas.openxmlformats.org/drawingml/2006/main" xmlns:r="http://schemas.openxmlformats.org/officeDocument/2006/relationships" xmlns:p="http://schemas.openxmlformats.org/presentationml/2006/main">
   <p:cSld>
     <p:bg>
-      <p:bgPr>
-        <a:solidFill>
-          <a:srgbClr val="1A1A2E"/>
-        </a:solidFill>
-        <a:effectLst/>
-      </p:bgPr>
+      <p:bgRef idx="1001">
+        <a:schemeClr val="bg1"/>
+      </p:bgRef>
     </p:bg>
     <p:spTree>
       <p:nvGrpSpPr>
@@ -2604,7 +2601,7 @@
         <p:spPr>
           <a:xfrm>
             <a:off x="457200" y="274638"/>
-            <a:ext cx="8229600" cy="1143000"/>
+            <a:ext cx="11277295" cy="1143000"/>
           </a:xfrm>
           <a:prstGeom prst="rect">
             <a:avLst/>
@@ -2637,7 +2634,7 @@
         <p:spPr>
           <a:xfrm>
             <a:off x="457200" y="1600200"/>
-            <a:ext cx="8229600" cy="4525963"/>
+            <a:ext cx="11277295" cy="4525963"/>
           </a:xfrm>
           <a:prstGeom prst="rect">
             <a:avLst/>
@@ -2699,7 +2696,7 @@
         <p:spPr>
           <a:xfrm>
             <a:off x="457200" y="6356350"/>
-            <a:ext cx="2133600" cy="365125"/>
+            <a:ext cx="3425898" cy="365125"/>
           </a:xfrm>
           <a:prstGeom prst="rect">
             <a:avLst/>
@@ -2739,8 +2736,8 @@
         </p:nvSpPr>
         <p:spPr>
           <a:xfrm>
-            <a:off x="3124200" y="6356350"/>
-            <a:ext cx="2895600" cy="365125"/>
+            <a:off x="3883098" y="6356350"/>
+            <a:ext cx="3425898" cy="365125"/>
           </a:xfrm>
           <a:prstGeom prst="rect">
             <a:avLst/>
@@ -2776,8 +2773,8 @@
         </p:nvSpPr>
         <p:spPr>
           <a:xfrm>
-            <a:off x="6553200" y="6356350"/>
-            <a:ext cx="2133600" cy="365125"/>
+            <a:off x="7308996" y="6356350"/>
+            <a:ext cx="3425898" cy="365125"/>
           </a:xfrm>
           <a:prstGeom prst="rect">
             <a:avLst/>
